--- a/_slides/slides_de_cours/13. LAM_slides.pptx
+++ b/_slides/slides_de_cours/13. LAM_slides.pptx
@@ -9004,7 +9004,7 @@
                   </a:solidFill>
                   <a:latin typeface="Consolas"/>
                 </a:rPr>
-                <a:t>IDE.16</a:t>
+                <a:t>IDE.15</a:t>
               </a:r>
               <a:r>
                 <a:rPr sz="2400"/>
